--- a/adv.data/mid/Lecture05_PLSQLProcedure_Summer2024-2025 (1).pptx
+++ b/adv.data/mid/Lecture05_PLSQLProcedure_Summer2024-2025 (1).pptx
@@ -204,6 +204,30 @@
 <file path=ppt/changesInfos/changesInfo1.xml><?xml version="1.0" encoding="utf-8"?>
 <pc:chgInfo xmlns:a="http://schemas.openxmlformats.org/drawingml/2006/main" xmlns:r="http://schemas.openxmlformats.org/officeDocument/2006/relationships" xmlns:ac="http://schemas.microsoft.com/office/drawing/2013/main/command" xmlns:pc="http://schemas.microsoft.com/office/powerpoint/2013/main/command">
   <pc:docChgLst>
+    <pc:chgData name="Juena Ahmed Noshin" userId="df4442bb-949b-4849-8a28-5716394ec665" providerId="ADAL" clId="{B9EFC547-EE47-4217-96AB-55B63746F307}"/>
+    <pc:docChg chg="modSld">
+      <pc:chgData name="Juena Ahmed Noshin" userId="df4442bb-949b-4849-8a28-5716394ec665" providerId="ADAL" clId="{B9EFC547-EE47-4217-96AB-55B63746F307}" dt="2023-04-05T10:37:18.828" v="3" actId="20577"/>
+      <pc:docMkLst>
+        <pc:docMk/>
+      </pc:docMkLst>
+      <pc:sldChg chg="modSp mod">
+        <pc:chgData name="Juena Ahmed Noshin" userId="df4442bb-949b-4849-8a28-5716394ec665" providerId="ADAL" clId="{B9EFC547-EE47-4217-96AB-55B63746F307}" dt="2023-04-05T10:37:18.828" v="3" actId="20577"/>
+        <pc:sldMkLst>
+          <pc:docMk/>
+          <pc:sldMk cId="2729903921" sldId="478"/>
+        </pc:sldMkLst>
+        <pc:spChg chg="mod">
+          <ac:chgData name="Juena Ahmed Noshin" userId="df4442bb-949b-4849-8a28-5716394ec665" providerId="ADAL" clId="{B9EFC547-EE47-4217-96AB-55B63746F307}" dt="2023-04-05T10:37:18.828" v="3" actId="20577"/>
+          <ac:spMkLst>
+            <pc:docMk/>
+            <pc:sldMk cId="2729903921" sldId="478"/>
+            <ac:spMk id="3" creationId="{00000000-0000-0000-0000-000000000000}"/>
+          </ac:spMkLst>
+        </pc:spChg>
+      </pc:sldChg>
+    </pc:docChg>
+  </pc:docChgLst>
+  <pc:docChgLst>
     <pc:chgData name="Juena Ahmed Noshin" userId="df4442bb-949b-4849-8a28-5716394ec665" providerId="ADAL" clId="{1DF432CE-1EED-470A-8F9D-584F59DC621A}"/>
     <pc:docChg chg="modSld">
       <pc:chgData name="Juena Ahmed Noshin" userId="df4442bb-949b-4849-8a28-5716394ec665" providerId="ADAL" clId="{1DF432CE-1EED-470A-8F9D-584F59DC621A}" dt="2024-06-22T03:01:24.259" v="3" actId="20577"/>
@@ -222,30 +246,6 @@
             <pc:docMk/>
             <pc:sldMk cId="0" sldId="419"/>
             <ac:spMk id="5" creationId="{00000000-0000-0000-0000-000000000000}"/>
-          </ac:spMkLst>
-        </pc:spChg>
-      </pc:sldChg>
-    </pc:docChg>
-  </pc:docChgLst>
-  <pc:docChgLst>
-    <pc:chgData name="Juena Ahmed Noshin" userId="df4442bb-949b-4849-8a28-5716394ec665" providerId="ADAL" clId="{B9EFC547-EE47-4217-96AB-55B63746F307}"/>
-    <pc:docChg chg="modSld">
-      <pc:chgData name="Juena Ahmed Noshin" userId="df4442bb-949b-4849-8a28-5716394ec665" providerId="ADAL" clId="{B9EFC547-EE47-4217-96AB-55B63746F307}" dt="2023-04-05T10:37:18.828" v="3" actId="20577"/>
-      <pc:docMkLst>
-        <pc:docMk/>
-      </pc:docMkLst>
-      <pc:sldChg chg="modSp mod">
-        <pc:chgData name="Juena Ahmed Noshin" userId="df4442bb-949b-4849-8a28-5716394ec665" providerId="ADAL" clId="{B9EFC547-EE47-4217-96AB-55B63746F307}" dt="2023-04-05T10:37:18.828" v="3" actId="20577"/>
-        <pc:sldMkLst>
-          <pc:docMk/>
-          <pc:sldMk cId="2729903921" sldId="478"/>
-        </pc:sldMkLst>
-        <pc:spChg chg="mod">
-          <ac:chgData name="Juena Ahmed Noshin" userId="df4442bb-949b-4849-8a28-5716394ec665" providerId="ADAL" clId="{B9EFC547-EE47-4217-96AB-55B63746F307}" dt="2023-04-05T10:37:18.828" v="3" actId="20577"/>
-          <ac:spMkLst>
-            <pc:docMk/>
-            <pc:sldMk cId="2729903921" sldId="478"/>
-            <ac:spMk id="3" creationId="{00000000-0000-0000-0000-000000000000}"/>
           </ac:spMkLst>
         </pc:spChg>
       </pc:sldChg>
@@ -8412,7 +8412,27 @@
             </a:r>
             <a:r>
               <a:rPr lang="en-US" sz="4200" dirty="0"/>
-              <a:t> parameter passes an initial value to a subprogram and returns an updated value to the caller</a:t>
+              <a:t> parameter </a:t>
+            </a:r>
+            <a:r>
+              <a:rPr lang="en-US" sz="4200" dirty="0">
+                <a:highlight>
+                  <a:srgbClr val="FFFF00"/>
+                </a:highlight>
+              </a:rPr>
+              <a:t>passes an initial value </a:t>
+            </a:r>
+            <a:r>
+              <a:rPr lang="en-US" sz="4200" dirty="0"/>
+              <a:t>to a subprogram and returns an </a:t>
+            </a:r>
+            <a:r>
+              <a:rPr lang="en-US" sz="4200" dirty="0">
+                <a:highlight>
+                  <a:srgbClr val="FFFF00"/>
+                </a:highlight>
+              </a:rPr>
+              <a:t>updated value to the caller</a:t>
             </a:r>
           </a:p>
           <a:p>
@@ -8435,10 +8455,18 @@
           </a:p>
           <a:p>
             <a:r>
-              <a:rPr lang="en-US" sz="4200" b="1" dirty="0"/>
+              <a:rPr lang="en-US" sz="4200" b="1" dirty="0">
+                <a:highlight>
+                  <a:srgbClr val="FFFF00"/>
+                </a:highlight>
+              </a:rPr>
               <a:t>Actual parameter is passed by value</a:t>
             </a:r>
-            <a:endParaRPr lang="en-US" sz="4200" dirty="0"/>
+            <a:endParaRPr lang="en-US" sz="4200" dirty="0">
+              <a:highlight>
+                <a:srgbClr val="FFFF00"/>
+              </a:highlight>
+            </a:endParaRPr>
           </a:p>
           <a:p>
             <a:endParaRPr lang="en-US" sz="4200" dirty="0"/>
@@ -10186,7 +10214,19 @@
             </a:r>
             <a:r>
               <a:rPr lang="en-US" sz="2600" dirty="0"/>
-              <a:t> is a program unit that performs a particular task</a:t>
+              <a:t> is a </a:t>
+            </a:r>
+            <a:r>
+              <a:rPr lang="en-US" sz="2600" dirty="0">
+                <a:highlight>
+                  <a:srgbClr val="FFFF00"/>
+                </a:highlight>
+              </a:rPr>
+              <a:t>program unit </a:t>
+            </a:r>
+            <a:r>
+              <a:rPr lang="en-US" sz="2600" dirty="0"/>
+              <a:t>that performs a particular task</a:t>
             </a:r>
           </a:p>
           <a:p>
@@ -10223,7 +10263,56 @@
                   <a:schemeClr val="tx1"/>
                 </a:solidFill>
               </a:rPr>
-              <a:t> − These subprograms return a single value; mainly used to compute and return a value.</a:t>
+              <a:t> − These subprograms return </a:t>
+            </a:r>
+            <a:r>
+              <a:rPr lang="en-US" sz="2600" dirty="0">
+                <a:solidFill>
+                  <a:schemeClr val="tx1"/>
+                </a:solidFill>
+                <a:highlight>
+                  <a:srgbClr val="FFFF00"/>
+                </a:highlight>
+              </a:rPr>
+              <a:t>a single value</a:t>
+            </a:r>
+            <a:r>
+              <a:rPr lang="en-US" sz="2600" dirty="0">
+                <a:solidFill>
+                  <a:schemeClr val="tx1"/>
+                </a:solidFill>
+              </a:rPr>
+              <a:t>; mainly used to </a:t>
+            </a:r>
+            <a:r>
+              <a:rPr lang="en-US" sz="2600" dirty="0">
+                <a:solidFill>
+                  <a:schemeClr val="tx1"/>
+                </a:solidFill>
+                <a:highlight>
+                  <a:srgbClr val="FFFF00"/>
+                </a:highlight>
+              </a:rPr>
+              <a:t>compute</a:t>
+            </a:r>
+            <a:r>
+              <a:rPr lang="en-US" sz="2600" dirty="0">
+                <a:solidFill>
+                  <a:schemeClr val="tx1"/>
+                </a:solidFill>
+              </a:rPr>
+              <a:t> and return a </a:t>
+            </a:r>
+            <a:r>
+              <a:rPr lang="en-US" sz="2600" dirty="0">
+                <a:solidFill>
+                  <a:schemeClr val="tx1"/>
+                </a:solidFill>
+                <a:highlight>
+                  <a:srgbClr val="FFFF00"/>
+                </a:highlight>
+              </a:rPr>
+              <a:t>value.</a:t>
             </a:r>
           </a:p>
           <a:p>
@@ -10242,7 +10331,64 @@
                   <a:schemeClr val="tx1"/>
                 </a:solidFill>
               </a:rPr>
-              <a:t> − These subprograms do not return a value directly; mainly used to perform an action.</a:t>
+              <a:t> − These subprograms do </a:t>
+            </a:r>
+            <a:r>
+              <a:rPr lang="en-US" sz="2600" dirty="0">
+                <a:solidFill>
+                  <a:schemeClr val="tx1"/>
+                </a:solidFill>
+                <a:highlight>
+                  <a:srgbClr val="FFFF00"/>
+                </a:highlight>
+              </a:rPr>
+              <a:t>not return </a:t>
+            </a:r>
+            <a:r>
+              <a:rPr lang="en-US" sz="2600" dirty="0">
+                <a:solidFill>
+                  <a:schemeClr val="tx1"/>
+                </a:solidFill>
+              </a:rPr>
+              <a:t>a value </a:t>
+            </a:r>
+            <a:r>
+              <a:rPr lang="en-US" sz="2600" dirty="0">
+                <a:solidFill>
+                  <a:schemeClr val="tx1"/>
+                </a:solidFill>
+                <a:highlight>
+                  <a:srgbClr val="FFFF00"/>
+                </a:highlight>
+              </a:rPr>
+              <a:t>directly;</a:t>
+            </a:r>
+            <a:r>
+              <a:rPr lang="en-US" sz="2600" dirty="0">
+                <a:solidFill>
+                  <a:schemeClr val="tx1"/>
+                </a:solidFill>
+              </a:rPr>
+              <a:t> mainly used to perform </a:t>
+            </a:r>
+            <a:r>
+              <a:rPr lang="en-US" sz="2600" dirty="0">
+                <a:solidFill>
+                  <a:schemeClr val="tx1"/>
+                </a:solidFill>
+                <a:highlight>
+                  <a:srgbClr val="FFFF00"/>
+                </a:highlight>
+              </a:rPr>
+              <a:t>an action</a:t>
+            </a:r>
+            <a:r>
+              <a:rPr lang="en-US" sz="2600" dirty="0">
+                <a:solidFill>
+                  <a:schemeClr val="tx1"/>
+                </a:solidFill>
+              </a:rPr>
+              <a:t>.</a:t>
             </a:r>
           </a:p>
           <a:p>
@@ -10474,7 +10620,39 @@
             </a:pPr>
             <a:r>
               <a:rPr lang="en-US" sz="3600" dirty="0"/>
-              <a:t>	It is an optional part. However, the declarative part for a subprogram does not start with the DECLARE keyword. It contains declarations of types, cursors, constants, variables, exceptions, and nested subprograms. These items are local to the subprogram and cease to exist when the subprogram completes execution.</a:t>
+              <a:t>	It is </a:t>
+            </a:r>
+            <a:r>
+              <a:rPr lang="en-US" sz="3600" dirty="0">
+                <a:highlight>
+                  <a:srgbClr val="FFFF00"/>
+                </a:highlight>
+              </a:rPr>
+              <a:t>an optional part</a:t>
+            </a:r>
+            <a:r>
+              <a:rPr lang="en-US" sz="3600" dirty="0"/>
+              <a:t>. However, the declarative part for a subprogram does not start with the DECLARE keyword. It contains declarations of types, cursors, constants, variables, exceptions, and nested subprograms. </a:t>
+            </a:r>
+            <a:r>
+              <a:rPr lang="en-US" sz="3600" dirty="0">
+                <a:highlight>
+                  <a:srgbClr val="FFFF00"/>
+                </a:highlight>
+              </a:rPr>
+              <a:t>These items are local to the subprogram </a:t>
+            </a:r>
+            <a:r>
+              <a:rPr lang="en-US" sz="3600" dirty="0"/>
+              <a:t>and </a:t>
+            </a:r>
+            <a:r>
+              <a:rPr lang="en-US" sz="3600" dirty="0">
+                <a:highlight>
+                  <a:srgbClr val="FFFF00"/>
+                </a:highlight>
+              </a:rPr>
+              <a:t>cease to exist when the subprogram completes execution.</a:t>
             </a:r>
           </a:p>
           <a:p>
@@ -10499,7 +10677,19 @@
             </a:pPr>
             <a:r>
               <a:rPr lang="en-US" sz="3600" dirty="0"/>
-              <a:t>	This is a mandatory part and contains statements that perform the designated action.</a:t>
+              <a:t>	This is a </a:t>
+            </a:r>
+            <a:r>
+              <a:rPr lang="en-US" sz="3600" dirty="0">
+                <a:highlight>
+                  <a:srgbClr val="FFFF00"/>
+                </a:highlight>
+              </a:rPr>
+              <a:t>mandatory part </a:t>
+            </a:r>
+            <a:r>
+              <a:rPr lang="en-US" sz="3600" dirty="0"/>
+              <a:t>and contains statements that perform the designated action.</a:t>
             </a:r>
           </a:p>
           <a:p>
@@ -10846,7 +11036,45 @@
                   <a:schemeClr val="tx1"/>
                 </a:solidFill>
               </a:rPr>
-              <a:t> represents the value that will be passed from outside and OUT represents the parameter that will be used to return a value outside of the procedure.</a:t>
+              <a:t> represents the value that will be </a:t>
+            </a:r>
+            <a:r>
+              <a:rPr lang="en-US" sz="2900" dirty="0">
+                <a:solidFill>
+                  <a:schemeClr val="tx1"/>
+                </a:solidFill>
+                <a:highlight>
+                  <a:srgbClr val="FFFF00"/>
+                </a:highlight>
+              </a:rPr>
+              <a:t>passed from outside </a:t>
+            </a:r>
+            <a:r>
+              <a:rPr lang="en-US" sz="2900" dirty="0">
+                <a:solidFill>
+                  <a:schemeClr val="tx1"/>
+                </a:solidFill>
+              </a:rPr>
+              <a:t>and OUT represents the parameter that will be used </a:t>
+            </a:r>
+            <a:r>
+              <a:rPr lang="en-US" sz="2900" dirty="0">
+                <a:solidFill>
+                  <a:schemeClr val="tx1"/>
+                </a:solidFill>
+                <a:highlight>
+                  <a:srgbClr val="FFFF00"/>
+                </a:highlight>
+              </a:rPr>
+              <a:t>to return a value outside of the procedure</a:t>
+            </a:r>
+            <a:r>
+              <a:rPr lang="en-US" sz="2900" dirty="0">
+                <a:solidFill>
+                  <a:schemeClr val="tx1"/>
+                </a:solidFill>
+              </a:rPr>
+              <a:t>.</a:t>
             </a:r>
           </a:p>
           <a:p>
@@ -10875,6 +11103,9 @@
                 <a:solidFill>
                   <a:schemeClr val="tx1"/>
                 </a:solidFill>
+                <a:highlight>
+                  <a:srgbClr val="FFFF00"/>
+                </a:highlight>
               </a:rPr>
               <a:t>The AS keyword is used instead of the IS keyword for creating a standalone procedure.</a:t>
             </a:r>
@@ -11289,7 +11520,19 @@
           <a:p>
             <a:r>
               <a:rPr lang="en-US" sz="3600" dirty="0"/>
-              <a:t>A standalone procedure can be called by −</a:t>
+              <a:t>A </a:t>
+            </a:r>
+            <a:r>
+              <a:rPr lang="en-US" sz="3600" dirty="0">
+                <a:highlight>
+                  <a:srgbClr val="FFFF00"/>
+                </a:highlight>
+              </a:rPr>
+              <a:t>standalone</a:t>
+            </a:r>
+            <a:r>
+              <a:rPr lang="en-US" sz="3600" dirty="0"/>
+              <a:t> procedure can be called by −</a:t>
             </a:r>
           </a:p>
           <a:p>
@@ -11336,7 +11579,11 @@
               <a:t>	</a:t>
             </a:r>
             <a:r>
-              <a:rPr lang="en-US" sz="3200" b="1" i="1" dirty="0"/>
+              <a:rPr lang="en-US" sz="3200" b="1" i="1" dirty="0">
+                <a:highlight>
+                  <a:srgbClr val="FFFF00"/>
+                </a:highlight>
+              </a:rPr>
               <a:t>BEGIN </a:t>
             </a:r>
           </a:p>
@@ -11349,7 +11596,11 @@
               <a:defRPr/>
             </a:pPr>
             <a:r>
-              <a:rPr lang="en-US" sz="3200" b="1" i="1" dirty="0"/>
+              <a:rPr lang="en-US" sz="3200" b="1" i="1" dirty="0">
+                <a:highlight>
+                  <a:srgbClr val="FFFF00"/>
+                </a:highlight>
+              </a:rPr>
               <a:t>	   greetings; </a:t>
             </a:r>
           </a:p>
@@ -11362,7 +11613,11 @@
               <a:defRPr/>
             </a:pPr>
             <a:r>
-              <a:rPr lang="en-US" sz="3200" b="1" i="1" dirty="0"/>
+              <a:rPr lang="en-US" sz="3200" b="1" i="1" dirty="0">
+                <a:highlight>
+                  <a:srgbClr val="FFFF00"/>
+                </a:highlight>
+              </a:rPr>
               <a:t>	END; </a:t>
             </a:r>
           </a:p>
@@ -11579,14 +11834,46 @@
           <a:p>
             <a:r>
               <a:rPr lang="en-US" sz="4200" b="1" dirty="0"/>
-              <a:t>It is a read-only parameter</a:t>
+              <a:t>It is a </a:t>
+            </a:r>
+            <a:r>
+              <a:rPr lang="en-US" sz="4200" b="1" dirty="0">
+                <a:highlight>
+                  <a:srgbClr val="FFFF00"/>
+                </a:highlight>
+              </a:rPr>
+              <a:t>read-only</a:t>
+            </a:r>
+            <a:r>
+              <a:rPr lang="en-US" sz="4200" b="1" dirty="0"/>
+              <a:t> parameter</a:t>
             </a:r>
             <a:endParaRPr lang="en-US" sz="4200" dirty="0"/>
           </a:p>
           <a:p>
             <a:r>
               <a:rPr lang="en-US" sz="4200" dirty="0"/>
-              <a:t>Inside the subprogram, an IN parameter acts like a constant</a:t>
+              <a:t>Inside the subprogram, an </a:t>
+            </a:r>
+            <a:r>
+              <a:rPr lang="en-US" sz="4200" dirty="0">
+                <a:highlight>
+                  <a:srgbClr val="FFFF00"/>
+                </a:highlight>
+              </a:rPr>
+              <a:t>IN</a:t>
+            </a:r>
+            <a:r>
+              <a:rPr lang="en-US" sz="4200" dirty="0"/>
+              <a:t> parameter acts like a </a:t>
+            </a:r>
+            <a:r>
+              <a:rPr lang="en-US" sz="4200" dirty="0">
+                <a:highlight>
+                  <a:srgbClr val="FFFF00"/>
+                </a:highlight>
+              </a:rPr>
+              <a:t>constant</a:t>
             </a:r>
           </a:p>
           <a:p>
@@ -11609,16 +11896,28 @@
           </a:p>
           <a:p>
             <a:r>
-              <a:rPr lang="en-US" sz="4200" b="1" dirty="0"/>
+              <a:rPr lang="en-US" sz="4200" b="1" dirty="0">
+                <a:highlight>
+                  <a:srgbClr val="FFFF00"/>
+                </a:highlight>
+              </a:rPr>
               <a:t>It is the default mode of parameter passing</a:t>
             </a:r>
           </a:p>
           <a:p>
             <a:r>
-              <a:rPr lang="en-US" sz="4200" b="1" dirty="0"/>
+              <a:rPr lang="en-US" sz="4200" b="1" dirty="0">
+                <a:highlight>
+                  <a:srgbClr val="FFFF00"/>
+                </a:highlight>
+              </a:rPr>
               <a:t>Parameters are passed by reference</a:t>
             </a:r>
-            <a:endParaRPr lang="en-US" sz="4200" dirty="0"/>
+            <a:endParaRPr lang="en-US" sz="4200" dirty="0">
+              <a:highlight>
+                <a:srgbClr val="FFFF00"/>
+              </a:highlight>
+            </a:endParaRPr>
           </a:p>
           <a:p>
             <a:endParaRPr lang="en-US" sz="3600" dirty="0"/>
@@ -11793,7 +12092,15 @@
           <a:p>
             <a:r>
               <a:rPr lang="en-US" sz="3100" dirty="0"/>
-              <a:t>Inside the subprogram, an OUT parameter acts like a variable</a:t>
+              <a:t>Inside the subprogram, an OUT parameter acts like a </a:t>
+            </a:r>
+            <a:r>
+              <a:rPr lang="en-US" sz="3100" dirty="0">
+                <a:highlight>
+                  <a:srgbClr val="FFFF00"/>
+                </a:highlight>
+              </a:rPr>
+              <a:t>variable</a:t>
             </a:r>
           </a:p>
           <a:p>
@@ -11808,14 +12115,18 @@
               <a:t> </a:t>
             </a:r>
             <a:r>
-              <a:rPr lang="en-US" sz="3100" b="1" dirty="0"/>
-              <a:t>The actual parameter must be variable and it is passed </a:t>
-            </a:r>
-            <a:r>
-              <a:rPr lang="en-US" sz="3100" b="1"/>
-              <a:t>by value</a:t>
-            </a:r>
-            <a:endParaRPr lang="en-US" sz="3100" dirty="0"/>
+              <a:rPr lang="en-US" sz="3100" b="1" dirty="0">
+                <a:highlight>
+                  <a:srgbClr val="FFFF00"/>
+                </a:highlight>
+              </a:rPr>
+              <a:t>The actual parameter must be variable and it is passed by value</a:t>
+            </a:r>
+            <a:endParaRPr lang="en-US" sz="3100" dirty="0">
+              <a:highlight>
+                <a:srgbClr val="FFFF00"/>
+              </a:highlight>
+            </a:endParaRPr>
           </a:p>
           <a:p>
             <a:endParaRPr lang="en-US" sz="4200" dirty="0"/>
